--- a/assets/powerpoints/module-n3-metro/A3-les-seize-mots-du-transport-collectif.pptx
+++ b/assets/powerpoints/module-n3-metro/A3-les-seize-mots-du-transport-collectif.pptx
@@ -583,7 +583,7 @@
           <a:lstStyle/>
           <a:p>
             <a:r>
-              <a:t>Prépare l'exercice 3 de l'activité, qui fait glisser des photos sur ces mêmes phrases. Si le groupe a une station à proximité, la visiter : quinze minutes sur place valent une heure de diapositives.</a:t>
+              <a:t>Prépare l'exercice 3 de l'activité, qui reprend ces mêmes endroits par glisser-déposer. Si le groupe a une station à proximité, la visiter : quinze minutes sur place valent une heure de diapositives.</a:t>
             </a:r>
           </a:p>
         </p:txBody>
